--- a/Reporte 170926.pptx
+++ b/Reporte 170926.pptx
@@ -6574,10 +6574,10 @@
       </p:sp>
       <p:pic>
         <p:nvPicPr>
-          <p:cNvPr id="5" name="Imagen 4">
+          <p:cNvPr id="4" name="Imagen 3">
             <a:extLst>
               <a:ext uri="{FF2B5EF4-FFF2-40B4-BE49-F238E27FC236}">
-                <a16:creationId xmlns:a16="http://schemas.microsoft.com/office/drawing/2014/main" id="{3B45D2FB-A92F-44FD-FD46-1F884083DC80}"/>
+                <a16:creationId xmlns:a16="http://schemas.microsoft.com/office/drawing/2014/main" id="{07574F9F-0B75-DE98-0F3C-A4CED35962FE}"/>
               </a:ext>
             </a:extLst>
           </p:cNvPr>
@@ -6594,8 +6594,8 @@
         </p:blipFill>
         <p:spPr>
           <a:xfrm>
-            <a:off x="0" y="729446"/>
-            <a:ext cx="9144000" cy="3827483"/>
+            <a:off x="0" y="730099"/>
+            <a:ext cx="9144000" cy="3826177"/>
           </a:xfrm>
           <a:prstGeom prst="rect">
             <a:avLst/>
@@ -6680,10 +6680,10 @@
       </p:sp>
       <p:pic>
         <p:nvPicPr>
-          <p:cNvPr id="4" name="Imagen 3">
+          <p:cNvPr id="3" name="Imagen 2">
             <a:extLst>
               <a:ext uri="{FF2B5EF4-FFF2-40B4-BE49-F238E27FC236}">
-                <a16:creationId xmlns:a16="http://schemas.microsoft.com/office/drawing/2014/main" id="{4BE3E578-8F20-1B9E-0BDC-9482FC4EEB50}"/>
+                <a16:creationId xmlns:a16="http://schemas.microsoft.com/office/drawing/2014/main" id="{74AD98C6-6CC5-57C5-C7A7-09FC9CD1E431}"/>
               </a:ext>
             </a:extLst>
           </p:cNvPr>
@@ -6700,8 +6700,8 @@
         </p:blipFill>
         <p:spPr>
           <a:xfrm>
-            <a:off x="0" y="1171974"/>
-            <a:ext cx="9144000" cy="2942427"/>
+            <a:off x="0" y="1177803"/>
+            <a:ext cx="9144000" cy="2930769"/>
           </a:xfrm>
           <a:prstGeom prst="rect">
             <a:avLst/>
@@ -6786,10 +6786,10 @@
       </p:sp>
       <p:pic>
         <p:nvPicPr>
-          <p:cNvPr id="4" name="Imagen 3">
+          <p:cNvPr id="5" name="Imagen 4">
             <a:extLst>
               <a:ext uri="{FF2B5EF4-FFF2-40B4-BE49-F238E27FC236}">
-                <a16:creationId xmlns:a16="http://schemas.microsoft.com/office/drawing/2014/main" id="{EE68AD2C-2DEB-9BC3-0A20-8CE13E29F548}"/>
+                <a16:creationId xmlns:a16="http://schemas.microsoft.com/office/drawing/2014/main" id="{26681D79-09B4-E9CD-EE6E-D6A208DCB979}"/>
               </a:ext>
             </a:extLst>
           </p:cNvPr>
@@ -6806,8 +6806,8 @@
         </p:blipFill>
         <p:spPr>
           <a:xfrm>
-            <a:off x="0" y="435429"/>
-            <a:ext cx="9144000" cy="4415518"/>
+            <a:off x="0" y="591347"/>
+            <a:ext cx="9144000" cy="4103682"/>
           </a:xfrm>
           <a:prstGeom prst="rect">
             <a:avLst/>
@@ -6892,10 +6892,10 @@
       </p:sp>
       <p:pic>
         <p:nvPicPr>
-          <p:cNvPr id="4" name="Imagen 3">
+          <p:cNvPr id="3" name="Imagen 2">
             <a:extLst>
               <a:ext uri="{FF2B5EF4-FFF2-40B4-BE49-F238E27FC236}">
-                <a16:creationId xmlns:a16="http://schemas.microsoft.com/office/drawing/2014/main" id="{67D6DEE1-6CF0-6F14-FF14-F07E9FF0AA9E}"/>
+                <a16:creationId xmlns:a16="http://schemas.microsoft.com/office/drawing/2014/main" id="{929D8BE8-2BE6-7B45-F7D2-A486E1134E25}"/>
               </a:ext>
             </a:extLst>
           </p:cNvPr>
@@ -6912,8 +6912,8 @@
         </p:blipFill>
         <p:spPr>
           <a:xfrm>
-            <a:off x="0" y="1209703"/>
-            <a:ext cx="9144000" cy="2983294"/>
+            <a:off x="0" y="1193342"/>
+            <a:ext cx="9144000" cy="2899691"/>
           </a:xfrm>
           <a:prstGeom prst="rect">
             <a:avLst/>
@@ -6998,10 +6998,10 @@
       </p:sp>
       <p:pic>
         <p:nvPicPr>
-          <p:cNvPr id="4" name="Imagen 3">
+          <p:cNvPr id="3" name="Imagen 2">
             <a:extLst>
               <a:ext uri="{FF2B5EF4-FFF2-40B4-BE49-F238E27FC236}">
-                <a16:creationId xmlns:a16="http://schemas.microsoft.com/office/drawing/2014/main" id="{35271363-B6A6-BF90-9359-E9F4A1C6E0BD}"/>
+                <a16:creationId xmlns:a16="http://schemas.microsoft.com/office/drawing/2014/main" id="{E632E27A-EE83-7EFB-AC8C-3E74432702A8}"/>
               </a:ext>
             </a:extLst>
           </p:cNvPr>
@@ -7018,8 +7018,8 @@
         </p:blipFill>
         <p:spPr>
           <a:xfrm>
-            <a:off x="0" y="549971"/>
-            <a:ext cx="9144000" cy="4360357"/>
+            <a:off x="0" y="1585183"/>
+            <a:ext cx="9144000" cy="2116009"/>
           </a:xfrm>
           <a:prstGeom prst="rect">
             <a:avLst/>
